--- a/downloads/group/E5_Nexus_Lab.pptx
+++ b/downloads/group/E5_Nexus_Lab.pptx
@@ -509,7 +509,7 @@
           <a:p>
             <a:fld id="{E51B3D3D-D138-E140-AF13-0650BFE246DD}" type="datetimeFigureOut">
               <a:rPr lang="en-US" smtClean="0"/>
-              <a:t>12/16/25</a:t>
+              <a:t>3/13/26</a:t>
             </a:fld>
             <a:endParaRPr lang="en-US"/>
           </a:p>
@@ -1014,7 +1014,7 @@
           <a:p>
             <a:fld id="{D997B5FA-0921-464F-AAE1-844C04324D75}" type="datetimeFigureOut">
               <a:rPr lang="zh-CN" altLang="en-US" smtClean="0"/>
-              <a:t>2025/12/16</a:t>
+              <a:t>2026/3/13</a:t>
             </a:fld>
             <a:endParaRPr lang="zh-CN" altLang="en-US"/>
           </a:p>
@@ -1177,7 +1177,7 @@
           <a:p>
             <a:fld id="{D997B5FA-0921-464F-AAE1-844C04324D75}" type="datetimeFigureOut">
               <a:rPr lang="zh-CN" altLang="en-US" smtClean="0"/>
-              <a:t>2025/12/16</a:t>
+              <a:t>2026/3/13</a:t>
             </a:fld>
             <a:endParaRPr lang="zh-CN" altLang="en-US"/>
           </a:p>
@@ -1350,7 +1350,7 @@
           <a:p>
             <a:fld id="{D997B5FA-0921-464F-AAE1-844C04324D75}" type="datetimeFigureOut">
               <a:rPr lang="zh-CN" altLang="en-US" smtClean="0"/>
-              <a:t>2025/12/16</a:t>
+              <a:t>2026/3/13</a:t>
             </a:fld>
             <a:endParaRPr lang="zh-CN" altLang="en-US"/>
           </a:p>
@@ -1513,7 +1513,7 @@
           <a:p>
             <a:fld id="{D997B5FA-0921-464F-AAE1-844C04324D75}" type="datetimeFigureOut">
               <a:rPr lang="zh-CN" altLang="en-US" smtClean="0"/>
-              <a:t>2025/12/16</a:t>
+              <a:t>2026/3/13</a:t>
             </a:fld>
             <a:endParaRPr lang="zh-CN" altLang="en-US"/>
           </a:p>
@@ -1753,7 +1753,7 @@
           <a:p>
             <a:fld id="{D997B5FA-0921-464F-AAE1-844C04324D75}" type="datetimeFigureOut">
               <a:rPr lang="zh-CN" altLang="en-US" smtClean="0"/>
-              <a:t>2025/12/16</a:t>
+              <a:t>2026/3/13</a:t>
             </a:fld>
             <a:endParaRPr lang="zh-CN" altLang="en-US"/>
           </a:p>
@@ -1977,7 +1977,7 @@
           <a:p>
             <a:fld id="{D997B5FA-0921-464F-AAE1-844C04324D75}" type="datetimeFigureOut">
               <a:rPr lang="zh-CN" altLang="en-US" smtClean="0"/>
-              <a:t>2025/12/16</a:t>
+              <a:t>2026/3/13</a:t>
             </a:fld>
             <a:endParaRPr lang="zh-CN" altLang="en-US"/>
           </a:p>
@@ -2336,7 +2336,7 @@
           <a:p>
             <a:fld id="{D997B5FA-0921-464F-AAE1-844C04324D75}" type="datetimeFigureOut">
               <a:rPr lang="zh-CN" altLang="en-US" smtClean="0"/>
-              <a:t>2025/12/16</a:t>
+              <a:t>2026/3/13</a:t>
             </a:fld>
             <a:endParaRPr lang="zh-CN" altLang="en-US"/>
           </a:p>
@@ -2448,7 +2448,7 @@
           <a:p>
             <a:fld id="{D997B5FA-0921-464F-AAE1-844C04324D75}" type="datetimeFigureOut">
               <a:rPr lang="zh-CN" altLang="en-US" smtClean="0"/>
-              <a:t>2025/12/16</a:t>
+              <a:t>2026/3/13</a:t>
             </a:fld>
             <a:endParaRPr lang="zh-CN" altLang="en-US"/>
           </a:p>
@@ -2538,7 +2538,7 @@
           <a:p>
             <a:fld id="{D997B5FA-0921-464F-AAE1-844C04324D75}" type="datetimeFigureOut">
               <a:rPr lang="zh-CN" altLang="en-US" smtClean="0"/>
-              <a:t>2025/12/16</a:t>
+              <a:t>2026/3/13</a:t>
             </a:fld>
             <a:endParaRPr lang="zh-CN" altLang="en-US"/>
           </a:p>
@@ -2808,7 +2808,7 @@
           <a:p>
             <a:fld id="{D997B5FA-0921-464F-AAE1-844C04324D75}" type="datetimeFigureOut">
               <a:rPr lang="zh-CN" altLang="en-US" smtClean="0"/>
-              <a:t>2025/12/16</a:t>
+              <a:t>2026/3/13</a:t>
             </a:fld>
             <a:endParaRPr lang="zh-CN" altLang="en-US"/>
           </a:p>
@@ -3055,7 +3055,7 @@
           <a:p>
             <a:fld id="{D997B5FA-0921-464F-AAE1-844C04324D75}" type="datetimeFigureOut">
               <a:rPr lang="zh-CN" altLang="en-US" smtClean="0"/>
-              <a:t>2025/12/16</a:t>
+              <a:t>2026/3/13</a:t>
             </a:fld>
             <a:endParaRPr lang="zh-CN" altLang="en-US"/>
           </a:p>
@@ -3261,7 +3261,7 @@
           <a:p>
             <a:fld id="{D997B5FA-0921-464F-AAE1-844C04324D75}" type="datetimeFigureOut">
               <a:rPr lang="zh-CN" altLang="en-US" smtClean="0"/>
-              <a:t>2025/12/16</a:t>
+              <a:t>2026/3/13</a:t>
             </a:fld>
             <a:endParaRPr lang="zh-CN" altLang="en-US"/>
           </a:p>
@@ -6404,8 +6404,33 @@
                 <a:ea typeface="微软雅黑" panose="020B0503020204020204" pitchFamily="34" charset="-122"/>
                 <a:sym typeface="+mn-ea"/>
               </a:rPr>
-              <a:t>E5 Nexus Lab @ XXX</a:t>
-            </a:r>
+              <a:t>E5 Nexus Lab </a:t>
+            </a:r>
+            <a:r>
+              <a:rPr lang="en-GB" altLang="zh-CN" sz="3200" b="1">
+                <a:solidFill>
+                  <a:schemeClr val="tx1">
+                    <a:lumMod val="65000"/>
+                    <a:lumOff val="35000"/>
+                  </a:schemeClr>
+                </a:solidFill>
+                <a:latin typeface="微软雅黑" panose="020B0503020204020204" pitchFamily="34" charset="-122"/>
+                <a:ea typeface="微软雅黑" panose="020B0503020204020204" pitchFamily="34" charset="-122"/>
+                <a:sym typeface="+mn-ea"/>
+              </a:rPr>
+              <a:t>@ SJTU</a:t>
+            </a:r>
+            <a:endParaRPr lang="en-GB" altLang="zh-CN" sz="3200" b="1" dirty="0">
+              <a:solidFill>
+                <a:schemeClr val="tx1">
+                  <a:lumMod val="65000"/>
+                  <a:lumOff val="35000"/>
+                </a:schemeClr>
+              </a:solidFill>
+              <a:latin typeface="微软雅黑" panose="020B0503020204020204" pitchFamily="34" charset="-122"/>
+              <a:ea typeface="微软雅黑" panose="020B0503020204020204" pitchFamily="34" charset="-122"/>
+              <a:sym typeface="+mn-ea"/>
+            </a:endParaRPr>
           </a:p>
           <a:p>
             <a:pPr algn="ctr">
